--- a/АиКМС/прак_2/АиКМС прак 2.pptx
+++ b/АиКМС/прак_2/АиКМС прак 2.pptx
@@ -8,10 +8,9 @@
     <p:sldId id="256" r:id="rId2"/>
     <p:sldId id="261" r:id="rId3"/>
     <p:sldId id="262" r:id="rId4"/>
-    <p:sldId id="257" r:id="rId5"/>
-    <p:sldId id="258" r:id="rId6"/>
-    <p:sldId id="259" r:id="rId7"/>
-    <p:sldId id="260" r:id="rId8"/>
+    <p:sldId id="258" r:id="rId5"/>
+    <p:sldId id="259" r:id="rId6"/>
+    <p:sldId id="260" r:id="rId7"/>
   </p:sldIdLst>
   <p:sldSz cx="12192000" cy="6858000"/>
   <p:notesSz cx="6858000" cy="9144000"/>
@@ -855,7 +854,7 @@
           <a:p>
             <a:fld id="{90BD99E7-D6D0-4C3D-A150-02EDCE6F865C}" type="datetimeFigureOut">
               <a:rPr lang="ru-RU" smtClean="0"/>
-              <a:t>23.02.2025</a:t>
+              <a:t>25.02.2025</a:t>
             </a:fld>
             <a:endParaRPr lang="ru-RU"/>
           </a:p>
@@ -1106,7 +1105,7 @@
           <a:p>
             <a:fld id="{90BD99E7-D6D0-4C3D-A150-02EDCE6F865C}" type="datetimeFigureOut">
               <a:rPr lang="ru-RU" smtClean="0"/>
-              <a:t>23.02.2025</a:t>
+              <a:t>25.02.2025</a:t>
             </a:fld>
             <a:endParaRPr lang="ru-RU"/>
           </a:p>
@@ -1420,7 +1419,7 @@
           <a:p>
             <a:fld id="{90BD99E7-D6D0-4C3D-A150-02EDCE6F865C}" type="datetimeFigureOut">
               <a:rPr lang="ru-RU" smtClean="0"/>
-              <a:t>23.02.2025</a:t>
+              <a:t>25.02.2025</a:t>
             </a:fld>
             <a:endParaRPr lang="ru-RU"/>
           </a:p>
@@ -1747,7 +1746,7 @@
           <a:p>
             <a:fld id="{90BD99E7-D6D0-4C3D-A150-02EDCE6F865C}" type="datetimeFigureOut">
               <a:rPr lang="ru-RU" smtClean="0"/>
-              <a:t>23.02.2025</a:t>
+              <a:t>25.02.2025</a:t>
             </a:fld>
             <a:endParaRPr lang="ru-RU"/>
           </a:p>
@@ -2061,7 +2060,7 @@
           <a:p>
             <a:fld id="{90BD99E7-D6D0-4C3D-A150-02EDCE6F865C}" type="datetimeFigureOut">
               <a:rPr lang="ru-RU" smtClean="0"/>
-              <a:t>23.02.2025</a:t>
+              <a:t>25.02.2025</a:t>
             </a:fld>
             <a:endParaRPr lang="ru-RU"/>
           </a:p>
@@ -2448,7 +2447,7 @@
           <a:p>
             <a:fld id="{90BD99E7-D6D0-4C3D-A150-02EDCE6F865C}" type="datetimeFigureOut">
               <a:rPr lang="ru-RU" smtClean="0"/>
-              <a:t>23.02.2025</a:t>
+              <a:t>25.02.2025</a:t>
             </a:fld>
             <a:endParaRPr lang="ru-RU"/>
           </a:p>
@@ -2618,7 +2617,7 @@
           <a:p>
             <a:fld id="{90BD99E7-D6D0-4C3D-A150-02EDCE6F865C}" type="datetimeFigureOut">
               <a:rPr lang="ru-RU" smtClean="0"/>
-              <a:t>23.02.2025</a:t>
+              <a:t>25.02.2025</a:t>
             </a:fld>
             <a:endParaRPr lang="ru-RU"/>
           </a:p>
@@ -2798,7 +2797,7 @@
           <a:p>
             <a:fld id="{90BD99E7-D6D0-4C3D-A150-02EDCE6F865C}" type="datetimeFigureOut">
               <a:rPr lang="ru-RU" smtClean="0"/>
-              <a:t>23.02.2025</a:t>
+              <a:t>25.02.2025</a:t>
             </a:fld>
             <a:endParaRPr lang="ru-RU"/>
           </a:p>
@@ -2968,7 +2967,7 @@
           <a:p>
             <a:fld id="{90BD99E7-D6D0-4C3D-A150-02EDCE6F865C}" type="datetimeFigureOut">
               <a:rPr lang="ru-RU" smtClean="0"/>
-              <a:t>23.02.2025</a:t>
+              <a:t>25.02.2025</a:t>
             </a:fld>
             <a:endParaRPr lang="ru-RU"/>
           </a:p>
@@ -3215,7 +3214,7 @@
           <a:p>
             <a:fld id="{90BD99E7-D6D0-4C3D-A150-02EDCE6F865C}" type="datetimeFigureOut">
               <a:rPr lang="ru-RU" smtClean="0"/>
-              <a:t>23.02.2025</a:t>
+              <a:t>25.02.2025</a:t>
             </a:fld>
             <a:endParaRPr lang="ru-RU"/>
           </a:p>
@@ -3447,7 +3446,7 @@
           <a:p>
             <a:fld id="{90BD99E7-D6D0-4C3D-A150-02EDCE6F865C}" type="datetimeFigureOut">
               <a:rPr lang="ru-RU" smtClean="0"/>
-              <a:t>23.02.2025</a:t>
+              <a:t>25.02.2025</a:t>
             </a:fld>
             <a:endParaRPr lang="ru-RU"/>
           </a:p>
@@ -3821,7 +3820,7 @@
           <a:p>
             <a:fld id="{90BD99E7-D6D0-4C3D-A150-02EDCE6F865C}" type="datetimeFigureOut">
               <a:rPr lang="ru-RU" smtClean="0"/>
-              <a:t>23.02.2025</a:t>
+              <a:t>25.02.2025</a:t>
             </a:fld>
             <a:endParaRPr lang="ru-RU"/>
           </a:p>
@@ -3944,7 +3943,7 @@
           <a:p>
             <a:fld id="{90BD99E7-D6D0-4C3D-A150-02EDCE6F865C}" type="datetimeFigureOut">
               <a:rPr lang="ru-RU" smtClean="0"/>
-              <a:t>23.02.2025</a:t>
+              <a:t>25.02.2025</a:t>
             </a:fld>
             <a:endParaRPr lang="ru-RU"/>
           </a:p>
@@ -4039,7 +4038,7 @@
           <a:p>
             <a:fld id="{90BD99E7-D6D0-4C3D-A150-02EDCE6F865C}" type="datetimeFigureOut">
               <a:rPr lang="ru-RU" smtClean="0"/>
-              <a:t>23.02.2025</a:t>
+              <a:t>25.02.2025</a:t>
             </a:fld>
             <a:endParaRPr lang="ru-RU"/>
           </a:p>
@@ -4294,7 +4293,7 @@
           <a:p>
             <a:fld id="{90BD99E7-D6D0-4C3D-A150-02EDCE6F865C}" type="datetimeFigureOut">
               <a:rPr lang="ru-RU" smtClean="0"/>
-              <a:t>23.02.2025</a:t>
+              <a:t>25.02.2025</a:t>
             </a:fld>
             <a:endParaRPr lang="ru-RU"/>
           </a:p>
@@ -4557,7 +4556,7 @@
           <a:p>
             <a:fld id="{90BD99E7-D6D0-4C3D-A150-02EDCE6F865C}" type="datetimeFigureOut">
               <a:rPr lang="ru-RU" smtClean="0"/>
-              <a:t>23.02.2025</a:t>
+              <a:t>25.02.2025</a:t>
             </a:fld>
             <a:endParaRPr lang="ru-RU"/>
           </a:p>
@@ -5302,7 +5301,7 @@
           <a:p>
             <a:fld id="{90BD99E7-D6D0-4C3D-A150-02EDCE6F865C}" type="datetimeFigureOut">
               <a:rPr lang="ru-RU" smtClean="0"/>
-              <a:t>23.02.2025</a:t>
+              <a:t>25.02.2025</a:t>
             </a:fld>
             <a:endParaRPr lang="ru-RU"/>
           </a:p>
@@ -6082,6 +6081,13 @@
   <p:clrMapOvr>
     <a:masterClrMapping/>
   </p:clrMapOvr>
+  <p:timing>
+    <p:tnLst>
+      <p:par>
+        <p:cTn id="1" dur="indefinite" restart="never" nodeType="tmRoot"/>
+      </p:par>
+    </p:tnLst>
+  </p:timing>
 </p:sld>
 </file>
 
@@ -6192,154 +6198,6 @@
   <p:clrMapOvr>
     <a:masterClrMapping/>
   </p:clrMapOvr>
-</p:sld>
-</file>
-
-<file path=ppt/slides/slide4.xml><?xml version="1.0" encoding="utf-8"?>
-<p:sld xmlns:a="http://schemas.openxmlformats.org/drawingml/2006/main" xmlns:r="http://schemas.openxmlformats.org/officeDocument/2006/relationships" xmlns:p="http://schemas.openxmlformats.org/presentationml/2006/main">
-  <p:cSld>
-    <p:spTree>
-      <p:nvGrpSpPr>
-        <p:cNvPr id="1" name=""/>
-        <p:cNvGrpSpPr/>
-        <p:nvPr/>
-      </p:nvGrpSpPr>
-      <p:grpSpPr>
-        <a:xfrm>
-          <a:off x="0" y="0"/>
-          <a:ext cx="0" cy="0"/>
-          <a:chOff x="0" y="0"/>
-          <a:chExt cx="0" cy="0"/>
-        </a:xfrm>
-      </p:grpSpPr>
-      <p:sp>
-        <p:nvSpPr>
-          <p:cNvPr id="2" name="Заголовок 1"/>
-          <p:cNvSpPr>
-            <a:spLocks noGrp="1"/>
-          </p:cNvSpPr>
-          <p:nvPr>
-            <p:ph type="title"/>
-          </p:nvPr>
-        </p:nvSpPr>
-        <p:spPr>
-          <a:xfrm>
-            <a:off x="672062" y="562747"/>
-            <a:ext cx="8596668" cy="1320800"/>
-          </a:xfrm>
-        </p:spPr>
-        <p:txBody>
-          <a:bodyPr/>
-          <a:lstStyle/>
-          <a:p>
-            <a:r>
-              <a:rPr lang="ru-RU" dirty="0" smtClean="0"/>
-              <a:t>Выбор темы</a:t>
-            </a:r>
-            <a:endParaRPr lang="ru-RU" dirty="0"/>
-          </a:p>
-        </p:txBody>
-      </p:sp>
-      <p:sp>
-        <p:nvSpPr>
-          <p:cNvPr id="3" name="Объект 2"/>
-          <p:cNvSpPr>
-            <a:spLocks noGrp="1"/>
-          </p:cNvSpPr>
-          <p:nvPr>
-            <p:ph idx="1"/>
-          </p:nvPr>
-        </p:nvSpPr>
-        <p:spPr>
-          <a:xfrm>
-            <a:off x="672062" y="1223147"/>
-            <a:ext cx="8596668" cy="3880773"/>
-          </a:xfrm>
-        </p:spPr>
-        <p:txBody>
-          <a:bodyPr/>
-          <a:lstStyle/>
-          <a:p>
-            <a:r>
-              <a:rPr lang="ru-RU" dirty="0" smtClean="0"/>
-              <a:t>В ходе работы была выбрана тема: организация </a:t>
-            </a:r>
-            <a:r>
-              <a:rPr lang="ru-RU" dirty="0"/>
-              <a:t>работы платных курсов </a:t>
-            </a:r>
-            <a:r>
-              <a:rPr lang="ru-RU" dirty="0" smtClean="0"/>
-              <a:t>в </a:t>
-            </a:r>
-            <a:r>
-              <a:rPr lang="ru-RU" dirty="0" smtClean="0"/>
-              <a:t>сервисе онлайн-обучения</a:t>
-            </a:r>
-            <a:endParaRPr lang="ru-RU" dirty="0" smtClean="0"/>
-          </a:p>
-          <a:p>
-            <a:r>
-              <a:rPr lang="ru-RU" dirty="0" smtClean="0"/>
-              <a:t>Составим описание выбранного процесса: клиент может как поступить, так и отозвать заявление на платные курсы в образовательном учреждении. В каждом из описанных действий участвует преподаватель, ведущий курс, и бухгалтер образовательного учреждения.</a:t>
-            </a:r>
-          </a:p>
-          <a:p>
-            <a:endParaRPr lang="ru-RU" dirty="0"/>
-          </a:p>
-        </p:txBody>
-      </p:sp>
-      <p:pic>
-        <p:nvPicPr>
-          <p:cNvPr id="1026" name="Picture 2" descr="Picture background"/>
-          <p:cNvPicPr>
-            <a:picLocks noChangeAspect="1" noChangeArrowheads="1"/>
-          </p:cNvPicPr>
-          <p:nvPr/>
-        </p:nvPicPr>
-        <p:blipFill>
-          <a:blip r:embed="rId2" cstate="print">
-            <a:extLst>
-              <a:ext uri="{28A0092B-C50C-407E-A947-70E740481C1C}">
-                <a14:useLocalDpi xmlns:a14="http://schemas.microsoft.com/office/drawing/2010/main" val="0"/>
-              </a:ext>
-            </a:extLst>
-          </a:blip>
-          <a:srcRect/>
-          <a:stretch>
-            <a:fillRect/>
-          </a:stretch>
-        </p:blipFill>
-        <p:spPr bwMode="auto">
-          <a:xfrm>
-            <a:off x="1146629" y="3371584"/>
-            <a:ext cx="5545730" cy="3486416"/>
-          </a:xfrm>
-          <a:prstGeom prst="rect">
-            <a:avLst/>
-          </a:prstGeom>
-          <a:noFill/>
-          <a:extLst>
-            <a:ext uri="{909E8E84-426E-40DD-AFC4-6F175D3DCCD1}">
-              <a14:hiddenFill xmlns:a14="http://schemas.microsoft.com/office/drawing/2010/main">
-                <a:solidFill>
-                  <a:srgbClr val="FFFFFF"/>
-                </a:solidFill>
-              </a14:hiddenFill>
-            </a:ext>
-          </a:extLst>
-        </p:spPr>
-      </p:pic>
-    </p:spTree>
-    <p:extLst>
-      <p:ext uri="{BB962C8B-B14F-4D97-AF65-F5344CB8AC3E}">
-        <p14:creationId xmlns:p14="http://schemas.microsoft.com/office/powerpoint/2010/main" val="2043771179"/>
-      </p:ext>
-    </p:extLst>
-  </p:cSld>
-  <p:clrMapOvr>
-    <a:masterClrMapping/>
-  </p:clrMapOvr>
   <p:timing>
     <p:tnLst>
       <p:par>
@@ -6350,7 +6208,7 @@
 </p:sld>
 </file>
 
-<file path=ppt/slides/slide5.xml><?xml version="1.0" encoding="utf-8"?>
+<file path=ppt/slides/slide4.xml><?xml version="1.0" encoding="utf-8"?>
 <p:sld xmlns:a="http://schemas.openxmlformats.org/drawingml/2006/main" xmlns:r="http://schemas.openxmlformats.org/officeDocument/2006/relationships" xmlns:p="http://schemas.openxmlformats.org/presentationml/2006/main">
   <p:cSld>
     <p:spTree>
@@ -6486,7 +6344,7 @@
 </p:sld>
 </file>
 
-<file path=ppt/slides/slide6.xml><?xml version="1.0" encoding="utf-8"?>
+<file path=ppt/slides/slide5.xml><?xml version="1.0" encoding="utf-8"?>
 <p:sld xmlns:a="http://schemas.openxmlformats.org/drawingml/2006/main" xmlns:r="http://schemas.openxmlformats.org/officeDocument/2006/relationships" xmlns:p="http://schemas.openxmlformats.org/presentationml/2006/main">
   <p:cSld>
     <p:spTree>
@@ -6572,7 +6430,7 @@
       </p:sp>
       <p:pic>
         <p:nvPicPr>
-          <p:cNvPr id="6" name="Рисунок 5"/>
+          <p:cNvPr id="5" name="Рисунок 4"/>
           <p:cNvPicPr/>
           <p:nvPr/>
         </p:nvPicPr>
@@ -6584,8 +6442,8 @@
         </p:blipFill>
         <p:spPr>
           <a:xfrm>
-            <a:off x="898634" y="2254469"/>
-            <a:ext cx="7309781" cy="4603531"/>
+            <a:off x="472966" y="2349062"/>
+            <a:ext cx="7584253" cy="4508939"/>
           </a:xfrm>
           <a:prstGeom prst="rect">
             <a:avLst/>
@@ -6612,7 +6470,7 @@
 </p:sld>
 </file>
 
-<file path=ppt/slides/slide7.xml><?xml version="1.0" encoding="utf-8"?>
+<file path=ppt/slides/slide6.xml><?xml version="1.0" encoding="utf-8"?>
 <p:sld xmlns:a="http://schemas.openxmlformats.org/drawingml/2006/main" xmlns:r="http://schemas.openxmlformats.org/officeDocument/2006/relationships" xmlns:p="http://schemas.openxmlformats.org/presentationml/2006/main">
   <p:cSld>
     <p:spTree>
